--- a/boyun/timer_sim_verification/정보윤_타이머_시뮬레이션검증_v1.0.pptx
+++ b/boyun/timer_sim_verification/정보윤_타이머_시뮬레이션검증_v1.0.pptx
@@ -3740,6 +3740,10 @@
             <a:prstDash val="solid"/>
           </a:ln>
         </p:spPr>
+        <p:txBody>
+          <a:bodyPr/>
+          <a:p/>
+        </p:txBody>
       </p:sp>
       <p:sp>
         <p:nvSpPr>
@@ -4181,6 +4185,10 @@
             <a:prstDash val="solid"/>
           </a:ln>
         </p:spPr>
+        <p:txBody>
+          <a:bodyPr/>
+          <a:p/>
+        </p:txBody>
       </p:sp>
       <p:sp>
         <p:nvSpPr>
@@ -4208,6 +4216,10 @@
             <a:prstDash val="solid"/>
           </a:ln>
         </p:spPr>
+        <p:txBody>
+          <a:bodyPr/>
+          <a:p/>
+        </p:txBody>
       </p:sp>
       <p:sp>
         <p:nvSpPr>
@@ -4235,6 +4247,10 @@
             <a:prstDash val="solid"/>
           </a:ln>
         </p:spPr>
+        <p:txBody>
+          <a:bodyPr/>
+          <a:p/>
+        </p:txBody>
       </p:sp>
       <p:sp>
         <p:nvSpPr>
@@ -4262,6 +4278,10 @@
             <a:prstDash val="solid"/>
           </a:ln>
         </p:spPr>
+        <p:txBody>
+          <a:bodyPr/>
+          <a:p/>
+        </p:txBody>
       </p:sp>
       <p:sp>
         <p:nvSpPr>
@@ -4289,6 +4309,10 @@
             <a:prstDash val="solid"/>
           </a:ln>
         </p:spPr>
+        <p:txBody>
+          <a:bodyPr/>
+          <a:p/>
+        </p:txBody>
       </p:sp>
       <p:sp>
         <p:nvSpPr>
@@ -4923,6 +4947,10 @@
             <a:prstDash val="solid"/>
           </a:ln>
         </p:spPr>
+        <p:txBody>
+          <a:bodyPr/>
+          <a:p/>
+        </p:txBody>
       </p:sp>
       <p:sp>
         <p:nvSpPr>
@@ -4950,6 +4978,10 @@
             <a:prstDash val="solid"/>
           </a:ln>
         </p:spPr>
+        <p:txBody>
+          <a:bodyPr/>
+          <a:p/>
+        </p:txBody>
       </p:sp>
       <p:sp>
         <p:nvSpPr>
@@ -4977,6 +5009,10 @@
             <a:prstDash val="solid"/>
           </a:ln>
         </p:spPr>
+        <p:txBody>
+          <a:bodyPr/>
+          <a:p/>
+        </p:txBody>
       </p:sp>
       <p:sp>
         <p:nvSpPr>
@@ -5004,6 +5040,10 @@
             <a:prstDash val="solid"/>
           </a:ln>
         </p:spPr>
+        <p:txBody>
+          <a:bodyPr/>
+          <a:p/>
+        </p:txBody>
       </p:sp>
       <p:sp>
         <p:nvSpPr>
@@ -5031,6 +5071,10 @@
             <a:prstDash val="solid"/>
           </a:ln>
         </p:spPr>
+        <p:txBody>
+          <a:bodyPr/>
+          <a:p/>
+        </p:txBody>
       </p:sp>
       <p:sp>
         <p:nvSpPr>
@@ -5058,6 +5102,10 @@
             <a:prstDash val="solid"/>
           </a:ln>
         </p:spPr>
+        <p:txBody>
+          <a:bodyPr/>
+          <a:p/>
+        </p:txBody>
       </p:sp>
       <p:sp>
         <p:nvSpPr>
@@ -5085,6 +5133,10 @@
             <a:prstDash val="solid"/>
           </a:ln>
         </p:spPr>
+        <p:txBody>
+          <a:bodyPr/>
+          <a:p/>
+        </p:txBody>
       </p:sp>
       <p:sp>
         <p:nvSpPr>
@@ -5869,6 +5921,10 @@
             <a:prstDash val="solid"/>
           </a:ln>
         </p:spPr>
+        <p:txBody>
+          <a:bodyPr/>
+          <a:p/>
+        </p:txBody>
       </p:sp>
       <p:sp>
         <p:nvSpPr>
@@ -5896,6 +5952,10 @@
             <a:prstDash val="solid"/>
           </a:ln>
         </p:spPr>
+        <p:txBody>
+          <a:bodyPr/>
+          <a:p/>
+        </p:txBody>
       </p:sp>
       <p:sp>
         <p:nvSpPr>
@@ -5923,6 +5983,10 @@
             <a:prstDash val="solid"/>
           </a:ln>
         </p:spPr>
+        <p:txBody>
+          <a:bodyPr/>
+          <a:p/>
+        </p:txBody>
       </p:sp>
       <p:sp>
         <p:nvSpPr>
@@ -5950,6 +6014,10 @@
             <a:prstDash val="solid"/>
           </a:ln>
         </p:spPr>
+        <p:txBody>
+          <a:bodyPr/>
+          <a:p/>
+        </p:txBody>
       </p:sp>
       <p:sp>
         <p:nvSpPr>
@@ -5977,6 +6045,10 @@
             <a:prstDash val="solid"/>
           </a:ln>
         </p:spPr>
+        <p:txBody>
+          <a:bodyPr/>
+          <a:p/>
+        </p:txBody>
       </p:sp>
       <p:sp>
         <p:nvSpPr>
@@ -6004,6 +6076,10 @@
             <a:prstDash val="solid"/>
           </a:ln>
         </p:spPr>
+        <p:txBody>
+          <a:bodyPr/>
+          <a:p/>
+        </p:txBody>
       </p:sp>
       <p:sp>
         <p:nvSpPr>
@@ -6717,6 +6793,10 @@
             <a:prstDash val="solid"/>
           </a:ln>
         </p:spPr>
+        <p:txBody>
+          <a:bodyPr/>
+          <a:p/>
+        </p:txBody>
       </p:sp>
       <p:sp>
         <p:nvSpPr>
@@ -6744,6 +6824,10 @@
             <a:prstDash val="solid"/>
           </a:ln>
         </p:spPr>
+        <p:txBody>
+          <a:bodyPr/>
+          <a:p/>
+        </p:txBody>
       </p:sp>
       <p:sp>
         <p:nvSpPr>
@@ -6771,6 +6855,10 @@
             <a:prstDash val="solid"/>
           </a:ln>
         </p:spPr>
+        <p:txBody>
+          <a:bodyPr/>
+          <a:p/>
+        </p:txBody>
       </p:sp>
       <p:sp>
         <p:nvSpPr>
@@ -6798,6 +6886,10 @@
             <a:prstDash val="solid"/>
           </a:ln>
         </p:spPr>
+        <p:txBody>
+          <a:bodyPr/>
+          <a:p/>
+        </p:txBody>
       </p:sp>
       <p:sp>
         <p:nvSpPr>
@@ -6825,6 +6917,10 @@
             <a:prstDash val="solid"/>
           </a:ln>
         </p:spPr>
+        <p:txBody>
+          <a:bodyPr/>
+          <a:p/>
+        </p:txBody>
       </p:sp>
       <p:sp>
         <p:nvSpPr>
@@ -6852,6 +6948,10 @@
             <a:prstDash val="solid"/>
           </a:ln>
         </p:spPr>
+        <p:txBody>
+          <a:bodyPr/>
+          <a:p/>
+        </p:txBody>
       </p:sp>
       <p:sp>
         <p:nvSpPr>
@@ -7607,6 +7707,10 @@
             <a:prstDash val="solid"/>
           </a:ln>
         </p:spPr>
+        <p:txBody>
+          <a:bodyPr/>
+          <a:p/>
+        </p:txBody>
       </p:sp>
       <p:sp>
         <p:nvSpPr>
@@ -7634,6 +7738,10 @@
             <a:prstDash val="solid"/>
           </a:ln>
         </p:spPr>
+        <p:txBody>
+          <a:bodyPr/>
+          <a:p/>
+        </p:txBody>
       </p:sp>
       <p:sp>
         <p:nvSpPr>
@@ -7661,6 +7769,10 @@
             <a:prstDash val="solid"/>
           </a:ln>
         </p:spPr>
+        <p:txBody>
+          <a:bodyPr/>
+          <a:p/>
+        </p:txBody>
       </p:sp>
       <p:sp>
         <p:nvSpPr>
@@ -7688,6 +7800,10 @@
             <a:prstDash val="solid"/>
           </a:ln>
         </p:spPr>
+        <p:txBody>
+          <a:bodyPr/>
+          <a:p/>
+        </p:txBody>
       </p:sp>
       <p:sp>
         <p:nvSpPr>
@@ -7715,6 +7831,10 @@
             <a:prstDash val="solid"/>
           </a:ln>
         </p:spPr>
+        <p:txBody>
+          <a:bodyPr/>
+          <a:p/>
+        </p:txBody>
       </p:sp>
       <p:sp>
         <p:nvSpPr>
@@ -7742,6 +7862,10 @@
             <a:prstDash val="solid"/>
           </a:ln>
         </p:spPr>
+        <p:txBody>
+          <a:bodyPr/>
+          <a:p/>
+        </p:txBody>
       </p:sp>
       <p:sp>
         <p:nvSpPr>
@@ -8419,6 +8543,10 @@
             <a:prstDash val="solid"/>
           </a:ln>
         </p:spPr>
+        <p:txBody>
+          <a:bodyPr/>
+          <a:p/>
+        </p:txBody>
       </p:sp>
       <p:sp>
         <p:nvSpPr>
@@ -8446,6 +8574,10 @@
             <a:prstDash val="solid"/>
           </a:ln>
         </p:spPr>
+        <p:txBody>
+          <a:bodyPr/>
+          <a:p/>
+        </p:txBody>
       </p:sp>
       <p:sp>
         <p:nvSpPr>
@@ -8473,6 +8605,10 @@
             <a:prstDash val="solid"/>
           </a:ln>
         </p:spPr>
+        <p:txBody>
+          <a:bodyPr/>
+          <a:p/>
+        </p:txBody>
       </p:sp>
       <p:sp>
         <p:nvSpPr>
@@ -8500,6 +8636,10 @@
             <a:prstDash val="solid"/>
           </a:ln>
         </p:spPr>
+        <p:txBody>
+          <a:bodyPr/>
+          <a:p/>
+        </p:txBody>
       </p:sp>
       <p:sp>
         <p:nvSpPr>
@@ -8527,6 +8667,10 @@
             <a:prstDash val="solid"/>
           </a:ln>
         </p:spPr>
+        <p:txBody>
+          <a:bodyPr/>
+          <a:p/>
+        </p:txBody>
       </p:sp>
       <p:sp>
         <p:nvSpPr>
@@ -8554,6 +8698,10 @@
             <a:prstDash val="solid"/>
           </a:ln>
         </p:spPr>
+        <p:txBody>
+          <a:bodyPr/>
+          <a:p/>
+        </p:txBody>
       </p:sp>
       <p:sp>
         <p:nvSpPr>
@@ -9267,6 +9415,10 @@
             <a:prstDash val="solid"/>
           </a:ln>
         </p:spPr>
+        <p:txBody>
+          <a:bodyPr/>
+          <a:p/>
+        </p:txBody>
       </p:sp>
       <p:sp>
         <p:nvSpPr>
@@ -9294,6 +9446,10 @@
             <a:prstDash val="solid"/>
           </a:ln>
         </p:spPr>
+        <p:txBody>
+          <a:bodyPr/>
+          <a:p/>
+        </p:txBody>
       </p:sp>
       <p:sp>
         <p:nvSpPr>
@@ -9321,6 +9477,10 @@
             <a:prstDash val="solid"/>
           </a:ln>
         </p:spPr>
+        <p:txBody>
+          <a:bodyPr/>
+          <a:p/>
+        </p:txBody>
       </p:sp>
       <p:sp>
         <p:nvSpPr>
@@ -9348,6 +9508,10 @@
             <a:prstDash val="solid"/>
           </a:ln>
         </p:spPr>
+        <p:txBody>
+          <a:bodyPr/>
+          <a:p/>
+        </p:txBody>
       </p:sp>
       <p:sp>
         <p:nvSpPr>
@@ -9375,6 +9539,10 @@
             <a:prstDash val="solid"/>
           </a:ln>
         </p:spPr>
+        <p:txBody>
+          <a:bodyPr/>
+          <a:p/>
+        </p:txBody>
       </p:sp>
       <p:sp>
         <p:nvSpPr>
@@ -9402,6 +9570,10 @@
             <a:prstDash val="solid"/>
           </a:ln>
         </p:spPr>
+        <p:txBody>
+          <a:bodyPr/>
+          <a:p/>
+        </p:txBody>
       </p:sp>
       <p:sp>
         <p:nvSpPr>
@@ -10107,6 +10279,10 @@
             <a:prstDash val="solid"/>
           </a:ln>
         </p:spPr>
+        <p:txBody>
+          <a:bodyPr/>
+          <a:p/>
+        </p:txBody>
       </p:sp>
       <p:sp>
         <p:nvSpPr>
@@ -10134,6 +10310,10 @@
             <a:prstDash val="solid"/>
           </a:ln>
         </p:spPr>
+        <p:txBody>
+          <a:bodyPr/>
+          <a:p/>
+        </p:txBody>
       </p:sp>
       <p:sp>
         <p:nvSpPr>
@@ -10161,6 +10341,10 @@
             <a:prstDash val="solid"/>
           </a:ln>
         </p:spPr>
+        <p:txBody>
+          <a:bodyPr/>
+          <a:p/>
+        </p:txBody>
       </p:sp>
       <p:sp>
         <p:nvSpPr>
@@ -10188,6 +10372,10 @@
             <a:prstDash val="solid"/>
           </a:ln>
         </p:spPr>
+        <p:txBody>
+          <a:bodyPr/>
+          <a:p/>
+        </p:txBody>
       </p:sp>
       <p:sp>
         <p:nvSpPr>
@@ -10215,6 +10403,10 @@
             <a:prstDash val="solid"/>
           </a:ln>
         </p:spPr>
+        <p:txBody>
+          <a:bodyPr/>
+          <a:p/>
+        </p:txBody>
       </p:sp>
       <p:sp>
         <p:nvSpPr>
@@ -10242,6 +10434,10 @@
             <a:prstDash val="solid"/>
           </a:ln>
         </p:spPr>
+        <p:txBody>
+          <a:bodyPr/>
+          <a:p/>
+        </p:txBody>
       </p:sp>
       <p:sp>
         <p:nvSpPr>
@@ -12900,6 +13096,10 @@
             <a:prstDash val="solid"/>
           </a:ln>
         </p:spPr>
+        <p:txBody>
+          <a:bodyPr/>
+          <a:p/>
+        </p:txBody>
       </p:sp>
       <p:sp>
         <p:nvSpPr>
@@ -13354,6 +13554,10 @@
             <a:prstDash val="solid"/>
           </a:ln>
         </p:spPr>
+        <p:txBody>
+          <a:bodyPr/>
+          <a:p/>
+        </p:txBody>
       </p:sp>
       <p:sp>
         <p:nvSpPr>
@@ -13381,6 +13585,10 @@
             <a:prstDash val="solid"/>
           </a:ln>
         </p:spPr>
+        <p:txBody>
+          <a:bodyPr/>
+          <a:p/>
+        </p:txBody>
       </p:sp>
       <p:sp>
         <p:nvSpPr>
@@ -13408,6 +13616,10 @@
             <a:prstDash val="solid"/>
           </a:ln>
         </p:spPr>
+        <p:txBody>
+          <a:bodyPr/>
+          <a:p/>
+        </p:txBody>
       </p:sp>
       <p:sp>
         <p:nvSpPr>
@@ -13435,6 +13647,10 @@
             <a:prstDash val="solid"/>
           </a:ln>
         </p:spPr>
+        <p:txBody>
+          <a:bodyPr/>
+          <a:p/>
+        </p:txBody>
       </p:sp>
       <p:sp>
         <p:nvSpPr>
@@ -13462,6 +13678,10 @@
             <a:prstDash val="solid"/>
           </a:ln>
         </p:spPr>
+        <p:txBody>
+          <a:bodyPr/>
+          <a:p/>
+        </p:txBody>
       </p:sp>
       <p:sp>
         <p:nvSpPr>
@@ -15610,6 +15830,10 @@
             <a:prstDash val="solid"/>
           </a:ln>
         </p:spPr>
+        <p:txBody>
+          <a:bodyPr/>
+          <a:p/>
+        </p:txBody>
       </p:sp>
       <p:sp>
         <p:nvSpPr>
@@ -15662,7 +15886,7 @@
                 <a:ea typeface="맑은 고딕" pitchFamily="34" charset="-122"/>
                 <a:cs typeface="맑은 고딕" pitchFamily="34" charset="-120"/>
               </a:rPr>
-              <a:t>정안성 (Claude 공동 작성)   </a:t>
+              <a:t>정안성   </a:t>
             </a:r>
             <a:pPr indent="0" marL="0">
               <a:buNone/>
@@ -15711,7 +15935,7 @@
                 <a:ea typeface="맑은 고딕" pitchFamily="34" charset="-122"/>
                 <a:cs typeface="맑은 고딕" pitchFamily="34" charset="-120"/>
               </a:rPr>
-              <a:t>상자 · 설명 · 슬라이드 </a:t>
+              <a:t>타이머 RTL </a:t>
             </a:r>
             <a:pPr indent="0" marL="0">
               <a:buNone/>
@@ -15725,42 +15949,7 @@
                 <a:ea typeface="맑은 고딕" pitchFamily="34" charset="-122"/>
                 <a:cs typeface="맑은 고딕" pitchFamily="34" charset="-120"/>
               </a:rPr>
-              <a:t>클로드코드로 작성, 정보윤 확인</a:t>
-            </a:r>
-            <a:endParaRPr lang="en-US" sz="1050" dirty="0"/>
-          </a:p>
-          <a:p>
-            <a:pPr marL="152400" indent="-152400">
-              <a:spcAft>
-                <a:spcPts val="300"/>
-              </a:spcAft>
-              <a:buSzPct val="100000"/>
-              <a:buChar char="•"/>
-            </a:pPr>
-            <a:r>
-              <a:rPr lang="en-US" sz="1050" b="1" dirty="0">
-                <a:solidFill>
-                  <a:srgbClr val="1F2937"/>
-                </a:solidFill>
-                <a:latin typeface="맑은 고딕" pitchFamily="34" charset="0"/>
-                <a:ea typeface="맑은 고딕" pitchFamily="34" charset="-122"/>
-                <a:cs typeface="맑은 고딕" pitchFamily="34" charset="-120"/>
-              </a:rPr>
-              <a:t>타이머 RTL </a:t>
-            </a:r>
-            <a:pPr indent="0" marL="0">
-              <a:buNone/>
-            </a:pPr>
-            <a:r>
-              <a:rPr lang="en-US" sz="1050" dirty="0">
-                <a:solidFill>
-                  <a:srgbClr val="374151"/>
-                </a:solidFill>
-                <a:latin typeface="맑은 고딕" pitchFamily="34" charset="0"/>
-                <a:ea typeface="맑은 고딕" pitchFamily="34" charset="-122"/>
-                <a:cs typeface="맑은 고딕" pitchFamily="34" charset="-120"/>
-              </a:rPr>
-              <a:t>클로드코드 참고 구현 → 팀 v2 통합 (정안성)</a:t>
+              <a:t>참고 구현 → 팀 v2 통합 (정안성)</a:t>
             </a:r>
             <a:endParaRPr lang="en-US" sz="1050" dirty="0"/>
           </a:p>
@@ -16642,6 +16831,10 @@
             <a:prstDash val="solid"/>
           </a:ln>
         </p:spPr>
+        <p:txBody>
+          <a:bodyPr/>
+          <a:p/>
+        </p:txBody>
       </p:sp>
       <p:sp>
         <p:nvSpPr>
@@ -16669,6 +16862,10 @@
             <a:prstDash val="solid"/>
           </a:ln>
         </p:spPr>
+        <p:txBody>
+          <a:bodyPr/>
+          <a:p/>
+        </p:txBody>
       </p:sp>
       <p:sp>
         <p:nvSpPr>
@@ -16696,6 +16893,10 @@
             <a:prstDash val="solid"/>
           </a:ln>
         </p:spPr>
+        <p:txBody>
+          <a:bodyPr/>
+          <a:p/>
+        </p:txBody>
       </p:sp>
       <p:sp>
         <p:nvSpPr>
@@ -16723,6 +16924,10 @@
             <a:prstDash val="solid"/>
           </a:ln>
         </p:spPr>
+        <p:txBody>
+          <a:bodyPr/>
+          <a:p/>
+        </p:txBody>
       </p:sp>
       <p:sp>
         <p:nvSpPr>
@@ -17242,6 +17447,10 @@
             <a:prstDash val="solid"/>
           </a:ln>
         </p:spPr>
+        <p:txBody>
+          <a:bodyPr/>
+          <a:p/>
+        </p:txBody>
       </p:sp>
       <p:sp>
         <p:nvSpPr>
@@ -17269,6 +17478,10 @@
             <a:prstDash val="solid"/>
           </a:ln>
         </p:spPr>
+        <p:txBody>
+          <a:bodyPr/>
+          <a:p/>
+        </p:txBody>
       </p:sp>
       <p:sp>
         <p:nvSpPr>
@@ -17296,6 +17509,10 @@
             <a:prstDash val="solid"/>
           </a:ln>
         </p:spPr>
+        <p:txBody>
+          <a:bodyPr/>
+          <a:p/>
+        </p:txBody>
       </p:sp>
       <p:sp>
         <p:nvSpPr>
@@ -17323,6 +17540,10 @@
             <a:prstDash val="solid"/>
           </a:ln>
         </p:spPr>
+        <p:txBody>
+          <a:bodyPr/>
+          <a:p/>
+        </p:txBody>
       </p:sp>
       <p:sp>
         <p:nvSpPr>
@@ -17856,6 +18077,10 @@
             <a:prstDash val="solid"/>
           </a:ln>
         </p:spPr>
+        <p:txBody>
+          <a:bodyPr/>
+          <a:p/>
+        </p:txBody>
       </p:sp>
       <p:sp>
         <p:nvSpPr>
@@ -17883,6 +18108,10 @@
             <a:prstDash val="solid"/>
           </a:ln>
         </p:spPr>
+        <p:txBody>
+          <a:bodyPr/>
+          <a:p/>
+        </p:txBody>
       </p:sp>
       <p:sp>
         <p:nvSpPr>
@@ -17910,6 +18139,10 @@
             <a:prstDash val="solid"/>
           </a:ln>
         </p:spPr>
+        <p:txBody>
+          <a:bodyPr/>
+          <a:p/>
+        </p:txBody>
       </p:sp>
       <p:sp>
         <p:nvSpPr>
@@ -17937,6 +18170,10 @@
             <a:prstDash val="solid"/>
           </a:ln>
         </p:spPr>
+        <p:txBody>
+          <a:bodyPr/>
+          <a:p/>
+        </p:txBody>
       </p:sp>
       <p:sp>
         <p:nvSpPr>
@@ -18470,6 +18707,10 @@
             <a:prstDash val="solid"/>
           </a:ln>
         </p:spPr>
+        <p:txBody>
+          <a:bodyPr/>
+          <a:p/>
+        </p:txBody>
       </p:sp>
       <p:sp>
         <p:nvSpPr>
@@ -18497,6 +18738,10 @@
             <a:prstDash val="solid"/>
           </a:ln>
         </p:spPr>
+        <p:txBody>
+          <a:bodyPr/>
+          <a:p/>
+        </p:txBody>
       </p:sp>
       <p:sp>
         <p:nvSpPr>
@@ -18524,6 +18769,10 @@
             <a:prstDash val="solid"/>
           </a:ln>
         </p:spPr>
+        <p:txBody>
+          <a:bodyPr/>
+          <a:p/>
+        </p:txBody>
       </p:sp>
       <p:sp>
         <p:nvSpPr>
@@ -18551,6 +18800,10 @@
             <a:prstDash val="solid"/>
           </a:ln>
         </p:spPr>
+        <p:txBody>
+          <a:bodyPr/>
+          <a:p/>
+        </p:txBody>
       </p:sp>
       <p:sp>
         <p:nvSpPr>
@@ -18578,6 +18831,10 @@
             <a:prstDash val="solid"/>
           </a:ln>
         </p:spPr>
+        <p:txBody>
+          <a:bodyPr/>
+          <a:p/>
+        </p:txBody>
       </p:sp>
       <p:sp>
         <p:nvSpPr>
@@ -18605,6 +18862,10 @@
             <a:prstDash val="solid"/>
           </a:ln>
         </p:spPr>
+        <p:txBody>
+          <a:bodyPr/>
+          <a:p/>
+        </p:txBody>
       </p:sp>
       <p:sp>
         <p:nvSpPr>
@@ -19360,6 +19621,10 @@
             <a:prstDash val="solid"/>
           </a:ln>
         </p:spPr>
+        <p:txBody>
+          <a:bodyPr/>
+          <a:p/>
+        </p:txBody>
       </p:sp>
       <p:sp>
         <p:nvSpPr>
@@ -19387,6 +19652,10 @@
             <a:prstDash val="solid"/>
           </a:ln>
         </p:spPr>
+        <p:txBody>
+          <a:bodyPr/>
+          <a:p/>
+        </p:txBody>
       </p:sp>
       <p:sp>
         <p:nvSpPr>
@@ -19414,6 +19683,10 @@
             <a:prstDash val="solid"/>
           </a:ln>
         </p:spPr>
+        <p:txBody>
+          <a:bodyPr/>
+          <a:p/>
+        </p:txBody>
       </p:sp>
       <p:sp>
         <p:nvSpPr>
@@ -19441,6 +19714,10 @@
             <a:prstDash val="solid"/>
           </a:ln>
         </p:spPr>
+        <p:txBody>
+          <a:bodyPr/>
+          <a:p/>
+        </p:txBody>
       </p:sp>
       <p:sp>
         <p:nvSpPr>
@@ -19468,6 +19745,10 @@
             <a:prstDash val="solid"/>
           </a:ln>
         </p:spPr>
+        <p:txBody>
+          <a:bodyPr/>
+          <a:p/>
+        </p:txBody>
       </p:sp>
       <p:sp>
         <p:nvSpPr>
@@ -19495,6 +19776,10 @@
             <a:prstDash val="solid"/>
           </a:ln>
         </p:spPr>
+        <p:txBody>
+          <a:bodyPr/>
+          <a:p/>
+        </p:txBody>
       </p:sp>
       <p:sp>
         <p:nvSpPr>
@@ -19522,6 +19807,10 @@
             <a:prstDash val="solid"/>
           </a:ln>
         </p:spPr>
+        <p:txBody>
+          <a:bodyPr/>
+          <a:p/>
+        </p:txBody>
       </p:sp>
       <p:sp>
         <p:nvSpPr>
@@ -22632,6 +22921,10 @@
             <a:prstDash val="solid"/>
           </a:ln>
         </p:spPr>
+        <p:txBody>
+          <a:bodyPr/>
+          <a:p/>
+        </p:txBody>
       </p:sp>
       <p:sp>
         <p:nvSpPr>
@@ -23066,6 +23359,10 @@
             <a:prstDash val="solid"/>
           </a:ln>
         </p:spPr>
+        <p:txBody>
+          <a:bodyPr/>
+          <a:p/>
+        </p:txBody>
       </p:sp>
       <p:sp>
         <p:nvSpPr>
@@ -23093,6 +23390,10 @@
             <a:prstDash val="solid"/>
           </a:ln>
         </p:spPr>
+        <p:txBody>
+          <a:bodyPr/>
+          <a:p/>
+        </p:txBody>
       </p:sp>
       <p:sp>
         <p:nvSpPr>
@@ -23120,6 +23421,10 @@
             <a:prstDash val="solid"/>
           </a:ln>
         </p:spPr>
+        <p:txBody>
+          <a:bodyPr/>
+          <a:p/>
+        </p:txBody>
       </p:sp>
       <p:sp>
         <p:nvSpPr>
@@ -23147,6 +23452,10 @@
             <a:prstDash val="solid"/>
           </a:ln>
         </p:spPr>
+        <p:txBody>
+          <a:bodyPr/>
+          <a:p/>
+        </p:txBody>
       </p:sp>
       <p:sp>
         <p:nvSpPr>
@@ -23174,6 +23483,10 @@
             <a:prstDash val="solid"/>
           </a:ln>
         </p:spPr>
+        <p:txBody>
+          <a:bodyPr/>
+          <a:p/>
+        </p:txBody>
       </p:sp>
       <p:sp>
         <p:nvSpPr>
@@ -23201,6 +23514,10 @@
             <a:prstDash val="solid"/>
           </a:ln>
         </p:spPr>
+        <p:txBody>
+          <a:bodyPr/>
+          <a:p/>
+        </p:txBody>
       </p:sp>
       <p:sp>
         <p:nvSpPr>
@@ -23878,6 +24195,10 @@
             <a:prstDash val="solid"/>
           </a:ln>
         </p:spPr>
+        <p:txBody>
+          <a:bodyPr/>
+          <a:p/>
+        </p:txBody>
       </p:sp>
       <p:sp>
         <p:nvSpPr>
@@ -23905,6 +24226,10 @@
             <a:prstDash val="solid"/>
           </a:ln>
         </p:spPr>
+        <p:txBody>
+          <a:bodyPr/>
+          <a:p/>
+        </p:txBody>
       </p:sp>
       <p:sp>
         <p:nvSpPr>
@@ -23932,6 +24257,10 @@
             <a:prstDash val="solid"/>
           </a:ln>
         </p:spPr>
+        <p:txBody>
+          <a:bodyPr/>
+          <a:p/>
+        </p:txBody>
       </p:sp>
       <p:sp>
         <p:nvSpPr>
@@ -23959,6 +24288,10 @@
             <a:prstDash val="solid"/>
           </a:ln>
         </p:spPr>
+        <p:txBody>
+          <a:bodyPr/>
+          <a:p/>
+        </p:txBody>
       </p:sp>
       <p:sp>
         <p:nvSpPr>
@@ -23986,6 +24319,10 @@
             <a:prstDash val="solid"/>
           </a:ln>
         </p:spPr>
+        <p:txBody>
+          <a:bodyPr/>
+          <a:p/>
+        </p:txBody>
       </p:sp>
       <p:sp>
         <p:nvSpPr>
@@ -24013,6 +24350,10 @@
             <a:prstDash val="solid"/>
           </a:ln>
         </p:spPr>
+        <p:txBody>
+          <a:bodyPr/>
+          <a:p/>
+        </p:txBody>
       </p:sp>
       <p:sp>
         <p:nvSpPr>
@@ -24690,6 +25031,10 @@
             <a:prstDash val="solid"/>
           </a:ln>
         </p:spPr>
+        <p:txBody>
+          <a:bodyPr/>
+          <a:p/>
+        </p:txBody>
       </p:sp>
       <p:sp>
         <p:nvSpPr>
@@ -24717,6 +25062,10 @@
             <a:prstDash val="solid"/>
           </a:ln>
         </p:spPr>
+        <p:txBody>
+          <a:bodyPr/>
+          <a:p/>
+        </p:txBody>
       </p:sp>
       <p:sp>
         <p:nvSpPr>
@@ -24744,6 +25093,10 @@
             <a:prstDash val="solid"/>
           </a:ln>
         </p:spPr>
+        <p:txBody>
+          <a:bodyPr/>
+          <a:p/>
+        </p:txBody>
       </p:sp>
       <p:sp>
         <p:nvSpPr>
@@ -24771,6 +25124,10 @@
             <a:prstDash val="solid"/>
           </a:ln>
         </p:spPr>
+        <p:txBody>
+          <a:bodyPr/>
+          <a:p/>
+        </p:txBody>
       </p:sp>
       <p:sp>
         <p:nvSpPr>
@@ -24798,6 +25155,10 @@
             <a:prstDash val="solid"/>
           </a:ln>
         </p:spPr>
+        <p:txBody>
+          <a:bodyPr/>
+          <a:p/>
+        </p:txBody>
       </p:sp>
       <p:sp>
         <p:nvSpPr>
@@ -24825,6 +25186,10 @@
             <a:prstDash val="solid"/>
           </a:ln>
         </p:spPr>
+        <p:txBody>
+          <a:bodyPr/>
+          <a:p/>
+        </p:txBody>
       </p:sp>
       <p:sp>
         <p:nvSpPr>
@@ -25524,6 +25889,10 @@
             <a:prstDash val="solid"/>
           </a:ln>
         </p:spPr>
+        <p:txBody>
+          <a:bodyPr/>
+          <a:p/>
+        </p:txBody>
       </p:sp>
       <p:sp>
         <p:nvSpPr>
@@ -25551,6 +25920,10 @@
             <a:prstDash val="solid"/>
           </a:ln>
         </p:spPr>
+        <p:txBody>
+          <a:bodyPr/>
+          <a:p/>
+        </p:txBody>
       </p:sp>
       <p:sp>
         <p:nvSpPr>
@@ -25578,6 +25951,10 @@
             <a:prstDash val="solid"/>
           </a:ln>
         </p:spPr>
+        <p:txBody>
+          <a:bodyPr/>
+          <a:p/>
+        </p:txBody>
       </p:sp>
       <p:sp>
         <p:nvSpPr>
@@ -25605,6 +25982,10 @@
             <a:prstDash val="solid"/>
           </a:ln>
         </p:spPr>
+        <p:txBody>
+          <a:bodyPr/>
+          <a:p/>
+        </p:txBody>
       </p:sp>
       <p:sp>
         <p:nvSpPr>
@@ -25632,6 +26013,10 @@
             <a:prstDash val="solid"/>
           </a:ln>
         </p:spPr>
+        <p:txBody>
+          <a:bodyPr/>
+          <a:p/>
+        </p:txBody>
       </p:sp>
       <p:sp>
         <p:nvSpPr>
@@ -25659,6 +26044,10 @@
             <a:prstDash val="solid"/>
           </a:ln>
         </p:spPr>
+        <p:txBody>
+          <a:bodyPr/>
+          <a:p/>
+        </p:txBody>
       </p:sp>
       <p:sp>
         <p:nvSpPr>
@@ -25686,6 +26075,10 @@
             <a:prstDash val="solid"/>
           </a:ln>
         </p:spPr>
+        <p:txBody>
+          <a:bodyPr/>
+          <a:p/>
+        </p:txBody>
       </p:sp>
       <p:sp>
         <p:nvSpPr>
@@ -28554,6 +28947,10 @@
             <a:prstDash val="solid"/>
           </a:ln>
         </p:spPr>
+        <p:txBody>
+          <a:bodyPr/>
+          <a:p/>
+        </p:txBody>
       </p:sp>
       <p:sp>
         <p:nvSpPr>
@@ -28581,6 +28978,10 @@
             <a:prstDash val="solid"/>
           </a:ln>
         </p:spPr>
+        <p:txBody>
+          <a:bodyPr/>
+          <a:p/>
+        </p:txBody>
       </p:sp>
       <p:sp>
         <p:nvSpPr>
@@ -28608,6 +29009,10 @@
             <a:prstDash val="solid"/>
           </a:ln>
         </p:spPr>
+        <p:txBody>
+          <a:bodyPr/>
+          <a:p/>
+        </p:txBody>
       </p:sp>
       <p:sp>
         <p:nvSpPr>
@@ -28635,6 +29040,10 @@
             <a:prstDash val="solid"/>
           </a:ln>
         </p:spPr>
+        <p:txBody>
+          <a:bodyPr/>
+          <a:p/>
+        </p:txBody>
       </p:sp>
       <p:sp>
         <p:nvSpPr>
@@ -28662,6 +29071,10 @@
             <a:prstDash val="solid"/>
           </a:ln>
         </p:spPr>
+        <p:txBody>
+          <a:bodyPr/>
+          <a:p/>
+        </p:txBody>
       </p:sp>
       <p:sp>
         <p:nvSpPr>
@@ -28689,6 +29102,10 @@
             <a:prstDash val="solid"/>
           </a:ln>
         </p:spPr>
+        <p:txBody>
+          <a:bodyPr/>
+          <a:p/>
+        </p:txBody>
       </p:sp>
       <p:sp>
         <p:nvSpPr>
@@ -28716,6 +29133,10 @@
             <a:prstDash val="solid"/>
           </a:ln>
         </p:spPr>
+        <p:txBody>
+          <a:bodyPr/>
+          <a:p/>
+        </p:txBody>
       </p:sp>
       <p:sp>
         <p:nvSpPr>
@@ -28743,6 +29164,10 @@
             <a:prstDash val="solid"/>
           </a:ln>
         </p:spPr>
+        <p:txBody>
+          <a:bodyPr/>
+          <a:p/>
+        </p:txBody>
       </p:sp>
       <p:sp>
         <p:nvSpPr>
@@ -29656,6 +30081,10 @@
             <a:prstDash val="solid"/>
           </a:ln>
         </p:spPr>
+        <p:txBody>
+          <a:bodyPr/>
+          <a:p/>
+        </p:txBody>
       </p:sp>
       <p:sp>
         <p:nvSpPr>
@@ -29683,6 +30112,10 @@
             <a:prstDash val="solid"/>
           </a:ln>
         </p:spPr>
+        <p:txBody>
+          <a:bodyPr/>
+          <a:p/>
+        </p:txBody>
       </p:sp>
       <p:sp>
         <p:nvSpPr>
@@ -29710,6 +30143,10 @@
             <a:prstDash val="solid"/>
           </a:ln>
         </p:spPr>
+        <p:txBody>
+          <a:bodyPr/>
+          <a:p/>
+        </p:txBody>
       </p:sp>
       <p:sp>
         <p:nvSpPr>
@@ -29737,6 +30174,10 @@
             <a:prstDash val="solid"/>
           </a:ln>
         </p:spPr>
+        <p:txBody>
+          <a:bodyPr/>
+          <a:p/>
+        </p:txBody>
       </p:sp>
       <p:sp>
         <p:nvSpPr>
@@ -29764,6 +30205,10 @@
             <a:prstDash val="solid"/>
           </a:ln>
         </p:spPr>
+        <p:txBody>
+          <a:bodyPr/>
+          <a:p/>
+        </p:txBody>
       </p:sp>
       <p:sp>
         <p:nvSpPr>
@@ -29791,6 +30236,10 @@
             <a:prstDash val="solid"/>
           </a:ln>
         </p:spPr>
+        <p:txBody>
+          <a:bodyPr/>
+          <a:p/>
+        </p:txBody>
       </p:sp>
       <p:sp>
         <p:nvSpPr>
@@ -29818,6 +30267,10 @@
             <a:prstDash val="solid"/>
           </a:ln>
         </p:spPr>
+        <p:txBody>
+          <a:bodyPr/>
+          <a:p/>
+        </p:txBody>
       </p:sp>
       <p:sp>
         <p:nvSpPr>
@@ -29845,6 +30298,10 @@
             <a:prstDash val="solid"/>
           </a:ln>
         </p:spPr>
+        <p:txBody>
+          <a:bodyPr/>
+          <a:p/>
+        </p:txBody>
       </p:sp>
       <p:sp>
         <p:nvSpPr>
@@ -30722,6 +31179,10 @@
             <a:prstDash val="solid"/>
           </a:ln>
         </p:spPr>
+        <p:txBody>
+          <a:bodyPr/>
+          <a:p/>
+        </p:txBody>
       </p:sp>
       <p:sp>
         <p:nvSpPr>
@@ -30749,6 +31210,10 @@
             <a:prstDash val="solid"/>
           </a:ln>
         </p:spPr>
+        <p:txBody>
+          <a:bodyPr/>
+          <a:p/>
+        </p:txBody>
       </p:sp>
       <p:sp>
         <p:nvSpPr>
@@ -30776,6 +31241,10 @@
             <a:prstDash val="solid"/>
           </a:ln>
         </p:spPr>
+        <p:txBody>
+          <a:bodyPr/>
+          <a:p/>
+        </p:txBody>
       </p:sp>
       <p:sp>
         <p:nvSpPr>
@@ -30803,6 +31272,10 @@
             <a:prstDash val="solid"/>
           </a:ln>
         </p:spPr>
+        <p:txBody>
+          <a:bodyPr/>
+          <a:p/>
+        </p:txBody>
       </p:sp>
       <p:sp>
         <p:nvSpPr>
@@ -30830,6 +31303,10 @@
             <a:prstDash val="solid"/>
           </a:ln>
         </p:spPr>
+        <p:txBody>
+          <a:bodyPr/>
+          <a:p/>
+        </p:txBody>
       </p:sp>
       <p:sp>
         <p:nvSpPr>
@@ -30857,6 +31334,10 @@
             <a:prstDash val="solid"/>
           </a:ln>
         </p:spPr>
+        <p:txBody>
+          <a:bodyPr/>
+          <a:p/>
+        </p:txBody>
       </p:sp>
       <p:sp>
         <p:nvSpPr>
@@ -30884,6 +31365,10 @@
             <a:prstDash val="solid"/>
           </a:ln>
         </p:spPr>
+        <p:txBody>
+          <a:bodyPr/>
+          <a:p/>
+        </p:txBody>
       </p:sp>
       <p:sp>
         <p:nvSpPr>
@@ -30911,6 +31396,10 @@
             <a:prstDash val="solid"/>
           </a:ln>
         </p:spPr>
+        <p:txBody>
+          <a:bodyPr/>
+          <a:p/>
+        </p:txBody>
       </p:sp>
       <p:sp>
         <p:nvSpPr>
@@ -30938,6 +31427,10 @@
             <a:prstDash val="solid"/>
           </a:ln>
         </p:spPr>
+        <p:txBody>
+          <a:bodyPr/>
+          <a:p/>
+        </p:txBody>
       </p:sp>
       <p:sp>
         <p:nvSpPr>
@@ -32231,6 +32724,10 @@
             <a:prstDash val="solid"/>
           </a:ln>
         </p:spPr>
+        <p:txBody>
+          <a:bodyPr/>
+          <a:p/>
+        </p:txBody>
       </p:sp>
       <p:sp>
         <p:nvSpPr>
@@ -32515,6 +33012,10 @@
             <a:tailEnd type="triangle"/>
           </a:ln>
         </p:spPr>
+        <p:txBody>
+          <a:bodyPr/>
+          <a:p/>
+        </p:txBody>
       </p:sp>
       <p:sp>
         <p:nvSpPr>
@@ -32635,6 +33136,10 @@
             <a:tailEnd type="triangle"/>
           </a:ln>
         </p:spPr>
+        <p:txBody>
+          <a:bodyPr/>
+          <a:p/>
+        </p:txBody>
       </p:sp>
       <p:sp>
         <p:nvSpPr>
@@ -32755,6 +33260,10 @@
             <a:tailEnd type="triangle"/>
           </a:ln>
         </p:spPr>
+        <p:txBody>
+          <a:bodyPr/>
+          <a:p/>
+        </p:txBody>
       </p:sp>
       <p:sp>
         <p:nvSpPr>
@@ -32875,6 +33384,10 @@
             <a:tailEnd type="triangle"/>
           </a:ln>
         </p:spPr>
+        <p:txBody>
+          <a:bodyPr/>
+          <a:p/>
+        </p:txBody>
       </p:sp>
       <p:sp>
         <p:nvSpPr>
@@ -32995,6 +33508,10 @@
             <a:tailEnd type="triangle"/>
           </a:ln>
         </p:spPr>
+        <p:txBody>
+          <a:bodyPr/>
+          <a:p/>
+        </p:txBody>
       </p:sp>
       <p:sp>
         <p:nvSpPr>
@@ -33194,6 +33711,10 @@
             <a:tailEnd type="triangle"/>
           </a:ln>
         </p:spPr>
+        <p:txBody>
+          <a:bodyPr/>
+          <a:p/>
+        </p:txBody>
       </p:sp>
       <p:sp>
         <p:nvSpPr>
@@ -33280,6 +33801,10 @@
             <a:tailEnd type="triangle"/>
           </a:ln>
         </p:spPr>
+        <p:txBody>
+          <a:bodyPr/>
+          <a:p/>
+        </p:txBody>
       </p:sp>
       <p:sp>
         <p:nvSpPr>
@@ -33383,6 +33908,10 @@
             <a:tailEnd type="triangle"/>
           </a:ln>
         </p:spPr>
+        <p:txBody>
+          <a:bodyPr/>
+          <a:p/>
+        </p:txBody>
       </p:sp>
       <p:sp>
         <p:nvSpPr>
@@ -33839,6 +34368,10 @@
             <a:prstDash val="solid"/>
           </a:ln>
         </p:spPr>
+        <p:txBody>
+          <a:bodyPr/>
+          <a:p/>
+        </p:txBody>
       </p:sp>
       <p:sp>
         <p:nvSpPr>
@@ -37375,6 +37908,10 @@
             <a:prstDash val="solid"/>
           </a:ln>
         </p:spPr>
+        <p:txBody>
+          <a:bodyPr/>
+          <a:p/>
+        </p:txBody>
       </p:sp>
       <p:sp>
         <p:nvSpPr>
@@ -37829,6 +38366,10 @@
             <a:prstDash val="solid"/>
           </a:ln>
         </p:spPr>
+        <p:txBody>
+          <a:bodyPr/>
+          <a:p/>
+        </p:txBody>
       </p:sp>
       <p:sp>
         <p:nvSpPr>
@@ -37856,6 +38397,10 @@
             <a:prstDash val="solid"/>
           </a:ln>
         </p:spPr>
+        <p:txBody>
+          <a:bodyPr/>
+          <a:p/>
+        </p:txBody>
       </p:sp>
       <p:sp>
         <p:nvSpPr>
@@ -37883,6 +38428,10 @@
             <a:prstDash val="solid"/>
           </a:ln>
         </p:spPr>
+        <p:txBody>
+          <a:bodyPr/>
+          <a:p/>
+        </p:txBody>
       </p:sp>
       <p:sp>
         <p:nvSpPr>
@@ -37910,6 +38459,10 @@
             <a:prstDash val="solid"/>
           </a:ln>
         </p:spPr>
+        <p:txBody>
+          <a:bodyPr/>
+          <a:p/>
+        </p:txBody>
       </p:sp>
       <p:sp>
         <p:nvSpPr>
@@ -37937,6 +38490,10 @@
             <a:prstDash val="solid"/>
           </a:ln>
         </p:spPr>
+        <p:txBody>
+          <a:bodyPr/>
+          <a:p/>
+        </p:txBody>
       </p:sp>
       <p:sp>
         <p:nvSpPr>
@@ -37964,6 +38521,10 @@
             <a:prstDash val="solid"/>
           </a:ln>
         </p:spPr>
+        <p:txBody>
+          <a:bodyPr/>
+          <a:p/>
+        </p:txBody>
       </p:sp>
       <p:sp>
         <p:nvSpPr>
@@ -38663,6 +39224,10 @@
             <a:prstDash val="solid"/>
           </a:ln>
         </p:spPr>
+        <p:txBody>
+          <a:bodyPr/>
+          <a:p/>
+        </p:txBody>
       </p:sp>
       <p:sp>
         <p:nvSpPr>
@@ -38690,6 +39255,10 @@
             <a:prstDash val="solid"/>
           </a:ln>
         </p:spPr>
+        <p:txBody>
+          <a:bodyPr/>
+          <a:p/>
+        </p:txBody>
       </p:sp>
       <p:sp>
         <p:nvSpPr>
@@ -38717,6 +39286,10 @@
             <a:prstDash val="solid"/>
           </a:ln>
         </p:spPr>
+        <p:txBody>
+          <a:bodyPr/>
+          <a:p/>
+        </p:txBody>
       </p:sp>
       <p:sp>
         <p:nvSpPr>
@@ -38744,6 +39317,10 @@
             <a:prstDash val="solid"/>
           </a:ln>
         </p:spPr>
+        <p:txBody>
+          <a:bodyPr/>
+          <a:p/>
+        </p:txBody>
       </p:sp>
       <p:sp>
         <p:nvSpPr>
@@ -38771,6 +39348,10 @@
             <a:prstDash val="solid"/>
           </a:ln>
         </p:spPr>
+        <p:txBody>
+          <a:bodyPr/>
+          <a:p/>
+        </p:txBody>
       </p:sp>
       <p:sp>
         <p:nvSpPr>
@@ -38798,6 +39379,10 @@
             <a:prstDash val="solid"/>
           </a:ln>
         </p:spPr>
+        <p:txBody>
+          <a:bodyPr/>
+          <a:p/>
+        </p:txBody>
       </p:sp>
       <p:sp>
         <p:nvSpPr>
@@ -38825,6 +39410,10 @@
             <a:prstDash val="solid"/>
           </a:ln>
         </p:spPr>
+        <p:txBody>
+          <a:bodyPr/>
+          <a:p/>
+        </p:txBody>
       </p:sp>
       <p:sp>
         <p:nvSpPr>
@@ -39659,6 +40248,10 @@
             <a:prstDash val="solid"/>
           </a:ln>
         </p:spPr>
+        <p:txBody>
+          <a:bodyPr/>
+          <a:p/>
+        </p:txBody>
       </p:sp>
       <p:sp>
         <p:nvSpPr>
@@ -39686,6 +40279,10 @@
             <a:prstDash val="solid"/>
           </a:ln>
         </p:spPr>
+        <p:txBody>
+          <a:bodyPr/>
+          <a:p/>
+        </p:txBody>
       </p:sp>
       <p:sp>
         <p:nvSpPr>
@@ -39713,6 +40310,10 @@
             <a:prstDash val="solid"/>
           </a:ln>
         </p:spPr>
+        <p:txBody>
+          <a:bodyPr/>
+          <a:p/>
+        </p:txBody>
       </p:sp>
       <p:sp>
         <p:nvSpPr>
@@ -39740,6 +40341,10 @@
             <a:prstDash val="solid"/>
           </a:ln>
         </p:spPr>
+        <p:txBody>
+          <a:bodyPr/>
+          <a:p/>
+        </p:txBody>
       </p:sp>
       <p:sp>
         <p:nvSpPr>

--- a/boyun/timer_sim_verification/정보윤_타이머_시뮬레이션검증_v1.0.pptx
+++ b/boyun/timer_sim_verification/정보윤_타이머_시뮬레이션검증_v1.0.pptx
@@ -15949,7 +15949,7 @@
                 <a:ea typeface="맑은 고딕" pitchFamily="34" charset="-122"/>
                 <a:cs typeface="맑은 고딕" pitchFamily="34" charset="-120"/>
               </a:rPr>
-              <a:t>참고 구현 → 팀 v2 통합 (정안성)</a:t>
+              <a:t>v1 → 팀 v2 통합 (정안성)</a:t>
             </a:r>
             <a:endParaRPr lang="en-US" sz="1050" dirty="0"/>
           </a:p>
